--- a/images/fig-measurement.pptx
+++ b/images/fig-measurement.pptx
@@ -531,7 +531,7 @@
           <a:p>
             <a:fld id="{C41F1D51-6559-429C-8767-371936093D5C}" type="datetimeFigureOut">
               <a:rPr lang="nb-NO" smtClean="0"/>
-              <a:t>22.05.2025</a:t>
+              <a:t>04.08.2026</a:t>
             </a:fld>
             <a:endParaRPr lang="nb-NO"/>
           </a:p>
@@ -731,7 +731,7 @@
           <a:p>
             <a:fld id="{C41F1D51-6559-429C-8767-371936093D5C}" type="datetimeFigureOut">
               <a:rPr lang="nb-NO" smtClean="0"/>
-              <a:t>22.05.2025</a:t>
+              <a:t>04.08.2026</a:t>
             </a:fld>
             <a:endParaRPr lang="nb-NO"/>
           </a:p>
@@ -941,7 +941,7 @@
           <a:p>
             <a:fld id="{C41F1D51-6559-429C-8767-371936093D5C}" type="datetimeFigureOut">
               <a:rPr lang="nb-NO" smtClean="0"/>
-              <a:t>22.05.2025</a:t>
+              <a:t>04.08.2026</a:t>
             </a:fld>
             <a:endParaRPr lang="nb-NO"/>
           </a:p>
@@ -1141,7 +1141,7 @@
           <a:p>
             <a:fld id="{C41F1D51-6559-429C-8767-371936093D5C}" type="datetimeFigureOut">
               <a:rPr lang="nb-NO" smtClean="0"/>
-              <a:t>22.05.2025</a:t>
+              <a:t>04.08.2026</a:t>
             </a:fld>
             <a:endParaRPr lang="nb-NO"/>
           </a:p>
@@ -1417,7 +1417,7 @@
           <a:p>
             <a:fld id="{C41F1D51-6559-429C-8767-371936093D5C}" type="datetimeFigureOut">
               <a:rPr lang="nb-NO" smtClean="0"/>
-              <a:t>22.05.2025</a:t>
+              <a:t>04.08.2026</a:t>
             </a:fld>
             <a:endParaRPr lang="nb-NO"/>
           </a:p>
@@ -1685,7 +1685,7 @@
           <a:p>
             <a:fld id="{C41F1D51-6559-429C-8767-371936093D5C}" type="datetimeFigureOut">
               <a:rPr lang="nb-NO" smtClean="0"/>
-              <a:t>22.05.2025</a:t>
+              <a:t>04.08.2026</a:t>
             </a:fld>
             <a:endParaRPr lang="nb-NO"/>
           </a:p>
@@ -2100,7 +2100,7 @@
           <a:p>
             <a:fld id="{C41F1D51-6559-429C-8767-371936093D5C}" type="datetimeFigureOut">
               <a:rPr lang="nb-NO" smtClean="0"/>
-              <a:t>22.05.2025</a:t>
+              <a:t>04.08.2026</a:t>
             </a:fld>
             <a:endParaRPr lang="nb-NO"/>
           </a:p>
@@ -2242,7 +2242,7 @@
           <a:p>
             <a:fld id="{C41F1D51-6559-429C-8767-371936093D5C}" type="datetimeFigureOut">
               <a:rPr lang="nb-NO" smtClean="0"/>
-              <a:t>22.05.2025</a:t>
+              <a:t>04.08.2026</a:t>
             </a:fld>
             <a:endParaRPr lang="nb-NO"/>
           </a:p>
@@ -2355,7 +2355,7 @@
           <a:p>
             <a:fld id="{C41F1D51-6559-429C-8767-371936093D5C}" type="datetimeFigureOut">
               <a:rPr lang="nb-NO" smtClean="0"/>
-              <a:t>22.05.2025</a:t>
+              <a:t>04.08.2026</a:t>
             </a:fld>
             <a:endParaRPr lang="nb-NO"/>
           </a:p>
@@ -2668,7 +2668,7 @@
           <a:p>
             <a:fld id="{C41F1D51-6559-429C-8767-371936093D5C}" type="datetimeFigureOut">
               <a:rPr lang="nb-NO" smtClean="0"/>
-              <a:t>22.05.2025</a:t>
+              <a:t>04.08.2026</a:t>
             </a:fld>
             <a:endParaRPr lang="nb-NO"/>
           </a:p>
@@ -2957,7 +2957,7 @@
           <a:p>
             <a:fld id="{C41F1D51-6559-429C-8767-371936093D5C}" type="datetimeFigureOut">
               <a:rPr lang="nb-NO" smtClean="0"/>
-              <a:t>22.05.2025</a:t>
+              <a:t>04.08.2026</a:t>
             </a:fld>
             <a:endParaRPr lang="nb-NO"/>
           </a:p>
@@ -3200,7 +3200,7 @@
           <a:p>
             <a:fld id="{C41F1D51-6559-429C-8767-371936093D5C}" type="datetimeFigureOut">
               <a:rPr lang="nb-NO" smtClean="0"/>
-              <a:t>22.05.2025</a:t>
+              <a:t>04.08.2026</a:t>
             </a:fld>
             <a:endParaRPr lang="nb-NO"/>
           </a:p>
@@ -4593,12 +4593,6 @@
             <a:pPr marL="342900" indent="-342900">
               <a:buAutoNum type="arabicParenBoth"/>
             </a:pPr>
-            <a:endParaRPr lang="nb-NO" dirty="0"/>
-          </a:p>
-          <a:p>
-            <a:pPr marL="342900" indent="-342900">
-              <a:buAutoNum type="arabicParenBoth"/>
-            </a:pPr>
             <a:r>
               <a:rPr lang="nb-NO" dirty="0"/>
               <a:t>Temperaturene stiger, men vi vet ikke hvorfor.</a:t>
@@ -4629,6 +4623,12 @@
             <a:pPr marL="342900" indent="-342900">
               <a:buAutoNum type="arabicParenBoth"/>
             </a:pPr>
+            <a:endParaRPr lang="nb-NO" dirty="0"/>
+          </a:p>
+          <a:p>
+            <a:pPr marL="342900" indent="-342900">
+              <a:buAutoNum type="arabicParenBoth"/>
+            </a:pPr>
             <a:r>
               <a:rPr lang="nb-NO" dirty="0"/>
               <a:t>Temperaturene stiger ikke</a:t>
@@ -4650,8 +4650,8 @@
         </p:nvSpPr>
         <p:spPr>
           <a:xfrm>
-            <a:off x="2286000" y="2310605"/>
-            <a:ext cx="295656" cy="841248"/>
+            <a:off x="2295144" y="3514206"/>
+            <a:ext cx="295656" cy="800513"/>
           </a:xfrm>
           <a:prstGeom prst="curvedRightArrow">
             <a:avLst/>
@@ -4706,7 +4706,7 @@
         </p:nvSpPr>
         <p:spPr>
           <a:xfrm>
-            <a:off x="2286000" y="3212090"/>
+            <a:off x="2295144" y="2370842"/>
             <a:ext cx="295656" cy="483029"/>
           </a:xfrm>
           <a:prstGeom prst="curvedRightArrow">
@@ -4762,7 +4762,7 @@
         </p:nvSpPr>
         <p:spPr>
           <a:xfrm>
-            <a:off x="2286000" y="3815594"/>
+            <a:off x="2295144" y="2942524"/>
             <a:ext cx="295656" cy="483029"/>
           </a:xfrm>
           <a:prstGeom prst="curvedRightArrow">
